--- a/materialien/Videos/02_Haeufigkeitsanalyse/KR_Video_02_Haeufigkeitsanalyse_Folien.pptx
+++ b/materialien/Videos/02_Haeufigkeitsanalyse/KR_Video_02_Haeufigkeitsanalyse_Folien.pptx
@@ -122,57 +122,57 @@
   <p:extLst>
     <p:ext uri="{521415D9-36F7-43E2-AB2F-B90AF26B5E84}">
       <p14:sectionLst xmlns:p14="http://schemas.microsoft.com/office/powerpoint/2010/main">
-        <p14:section name="Einstieg" id="{706b723b-48a8-1d67-3bed-560ba428568b}">
+        <p14:section name="Einstieg" id="{af132929-f546-18ed-ad02-c2cdd392805c}">
           <p14:sldIdLst>
             <p14:sldId id="256"/>
             <p14:sldId id="257"/>
           </p14:sldIdLst>
         </p14:section>
-        <p14:section name="Substitution mit Schlüsselwort" id="{2e131c95-555c-94fc-b1d3-3b0bdf949a1b}">
+        <p14:section name="Substitution mit Schlüsselwort" id="{b75a4523-c27b-1323-b175-d22345d56235}">
           <p14:sldIdLst>
             <p14:sldId id="258"/>
           </p14:sldIdLst>
         </p14:section>
-        <p14:section name="Al-Kindis Idee" id="{362e25e2-d876-4c3e-0c17-c9a33a5fce85}">
+        <p14:section name="Al-Kindis Idee" id="{81bd88c0-b4f1-1d75-7f6c-09d9d3e8eb3c}">
           <p14:sldIdLst>
             <p14:sldId id="259"/>
           </p14:sldIdLst>
         </p14:section>
-        <p14:section name="Ein Brief wird geknackt" id="{76b81b9b-cce2-55e5-e0d9-d3892ca20953}">
+        <p14:section name="Ein Brief wird geknackt" id="{633130ff-8ecc-e366-a94f-60bfefb9b294}">
           <p14:sldIdLst>
             <p14:sldId id="260"/>
             <p14:sldId id="261"/>
             <p14:sldId id="262"/>
           </p14:sldIdLst>
         </p14:section>
-        <p14:section name="Selbst ausprobieren" id="{bf443693-acda-4aa3-6ed8-fd11ac390729}">
+        <p14:section name="Selbst ausprobieren" id="{833bcd83-c8a0-4e7b-7a84-ac3794c11527}">
           <p14:sldIdLst>
             <p14:sldId id="263"/>
             <p14:sldId id="264"/>
             <p14:sldId id="265"/>
           </p14:sldIdLst>
         </p14:section>
-        <p14:section name="Prinzip erläutern" id="{c840f5d3-3df0-5415-495a-1934ecf86492}">
+        <p14:section name="Prinzip erläutern" id="{929ad2de-0aab-a081-0089-60392a5b9de4}">
           <p14:sldIdLst>
             <p14:sldId id="266"/>
           </p14:sldIdLst>
         </p14:section>
-        <p14:section name="Grenzen und Fallen" id="{72d55f81-1e85-29cd-1aa6-d1473b01602d}">
+        <p14:section name="Grenzen und Fallen" id="{61d6ca16-a376-6266-c1bb-a5ac4d2254b8}">
           <p14:sldIdLst>
             <p14:sldId id="267"/>
           </p14:sldIdLst>
         </p14:section>
-        <p14:section name="Gegenmittel" id="{dc5b8342-dccd-ff24-6a0c-bc8cb223d936}">
+        <p14:section name="Gegenmittel" id="{1e92f780-d60b-4c90-77eb-6deb3c26bab4}">
           <p14:sldIdLst>
             <p14:sldId id="268"/>
           </p14:sldIdLst>
         </p14:section>
-        <p14:section name="Typische Fehler" id="{ee6531c2-73b2-4996-eee4-f5c50f1b4e4c}">
+        <p14:section name="Typische Fehler" id="{a00475a1-b085-b6fe-f56f-5885f31f09ea}">
           <p14:sldIdLst>
             <p14:sldId id="269"/>
           </p14:sldIdLst>
         </p14:section>
-        <p14:section name="Zusammenfassung" id="{b939f646-5e19-8dff-43fb-15ef74b03893}">
+        <p14:section name="Zusammenfassung" id="{7cdf7650-e4fa-2332-a526-4e7d643434cb}">
           <p14:sldIdLst>
             <p14:sldId id="270"/>
             <p14:sldId id="271"/>
@@ -9941,7 +9941,7 @@
         <p:spPr>
           <a:xfrm>
             <a:off x="548640" y="1325880"/>
-            <a:ext cx="11094415" cy="773176"/>
+            <a:ext cx="7315200" cy="711200"/>
           </a:xfrm>
           <a:prstGeom prst="rect">
             <a:avLst/>
@@ -9957,14 +9957,14 @@
               <a:buNone/>
             </a:pPr>
             <a:r>
-              <a:rPr lang="en-US" sz="2200" dirty="0">
+              <a:rPr lang="en-US" sz="2000" dirty="0">
                 <a:solidFill>
                   <a:srgbClr val="1B1B1F"/>
                 </a:solidFill>
               </a:rPr>
               <a:t>Immer sagen, welche Häufigkeiten (Einzelbuchstaben, Teiltexte, Paare) und unter welchen Voraussetzungen.</a:t>
             </a:r>
-            <a:endParaRPr lang="en-US" sz="2200" dirty="0"/>
+            <a:endParaRPr lang="en-US" sz="2000" dirty="0"/>
           </a:p>
         </p:txBody>
       </p:sp>
@@ -9976,12 +9976,12 @@
         </p:nvSpPr>
         <p:spPr>
           <a:xfrm>
-            <a:off x="548640" y="2281936"/>
-            <a:ext cx="5364328" cy="2966212"/>
+            <a:off x="548640" y="2219960"/>
+            <a:ext cx="3474720" cy="3952240"/>
           </a:xfrm>
           <a:prstGeom prst="roundRect">
             <a:avLst>
-              <a:gd name="adj" fmla="val 2466"/>
+              <a:gd name="adj" fmla="val 2105"/>
             </a:avLst>
           </a:prstGeom>
           <a:solidFill>
@@ -10003,8 +10003,8 @@
         </p:nvSpPr>
         <p:spPr>
           <a:xfrm>
-            <a:off x="822960" y="2464816"/>
-            <a:ext cx="4815688" cy="365760"/>
+            <a:off x="822960" y="2402840"/>
+            <a:ext cx="2926080" cy="365760"/>
           </a:xfrm>
           <a:prstGeom prst="rect">
             <a:avLst/>
@@ -10039,8 +10039,8 @@
         </p:nvSpPr>
         <p:spPr>
           <a:xfrm>
-            <a:off x="822960" y="2967736"/>
-            <a:ext cx="4815688" cy="727456"/>
+            <a:off x="822960" y="2905760"/>
+            <a:ext cx="2926080" cy="975360"/>
           </a:xfrm>
           <a:prstGeom prst="rect">
             <a:avLst/>
@@ -10056,14 +10056,14 @@
               <a:buNone/>
             </a:pPr>
             <a:r>
-              <a:rPr lang="en-US" sz="2200" dirty="0">
+              <a:rPr lang="en-US" sz="2000" dirty="0">
                 <a:solidFill>
                   <a:srgbClr val="1B1B1F"/>
                 </a:solidFill>
               </a:rPr>
               <a:t>„Mit der Häufigkeitsanalyse kann man jedes Verfahren knacken.“</a:t>
             </a:r>
-            <a:endParaRPr lang="en-US" sz="2200" dirty="0"/>
+            <a:endParaRPr lang="en-US" sz="2000" dirty="0"/>
           </a:p>
         </p:txBody>
       </p:sp>
@@ -10075,8 +10075,8 @@
         </p:nvSpPr>
         <p:spPr>
           <a:xfrm>
-            <a:off x="822960" y="3823208"/>
-            <a:ext cx="4815688" cy="1068324"/>
+            <a:off x="822960" y="4009136"/>
+            <a:ext cx="2926080" cy="1285240"/>
           </a:xfrm>
           <a:prstGeom prst="rect">
             <a:avLst/>
@@ -10092,7 +10092,7 @@
               <a:buNone/>
             </a:pPr>
             <a:r>
-              <a:rPr lang="en-US" sz="2200" dirty="0">
+              <a:rPr lang="en-US" sz="2000" dirty="0">
                 <a:solidFill>
                   <a:srgbClr val="1B1B1F"/>
                 </a:solidFill>
@@ -10100,7 +10100,7 @@
               <a:t>Kurzer Text </a:t>
             </a:r>
             <a:r>
-              <a:rPr lang="en-US" sz="2200" dirty="0">
+              <a:rPr lang="en-US" sz="2000" dirty="0">
                 <a:solidFill>
                   <a:srgbClr val="1B1B1F"/>
                 </a:solidFill>
@@ -10111,7 +10111,7 @@
               <a:t>ZXKLL VATQZ GSHXA TTKT</a:t>
             </a:r>
             <a:r>
-              <a:rPr lang="en-US" sz="2200" dirty="0">
+              <a:rPr lang="en-US" sz="2000" dirty="0">
                 <a:solidFill>
                   <a:srgbClr val="1B1B1F"/>
                 </a:solidFill>
@@ -10119,7 +10119,7 @@
               <a:t>: T am häufigsten → T = e → k = 15 → </a:t>
             </a:r>
             <a:r>
-              <a:rPr lang="en-US" sz="2200" dirty="0">
+              <a:rPr lang="en-US" sz="2000" dirty="0">
                 <a:solidFill>
                   <a:srgbClr val="1B1B1F"/>
                 </a:solidFill>
@@ -10129,7 +10129,7 @@
               </a:rPr>
               <a:t>kivwwglebk…</a:t>
             </a:r>
-            <a:endParaRPr lang="en-US" sz="2200" dirty="0"/>
+            <a:endParaRPr lang="en-US" sz="2000" dirty="0"/>
           </a:p>
         </p:txBody>
       </p:sp>
@@ -10141,12 +10141,12 @@
         </p:nvSpPr>
         <p:spPr>
           <a:xfrm>
-            <a:off x="6278728" y="2281936"/>
-            <a:ext cx="5364328" cy="3890264"/>
+            <a:off x="4389120" y="2219960"/>
+            <a:ext cx="3474720" cy="3952240"/>
           </a:xfrm>
           <a:prstGeom prst="roundRect">
             <a:avLst>
-              <a:gd name="adj" fmla="val 1880"/>
+              <a:gd name="adj" fmla="val 2105"/>
             </a:avLst>
           </a:prstGeom>
           <a:solidFill>
@@ -10168,8 +10168,8 @@
         </p:nvSpPr>
         <p:spPr>
           <a:xfrm>
-            <a:off x="6553048" y="2464816"/>
-            <a:ext cx="4815688" cy="365760"/>
+            <a:off x="4663440" y="2402840"/>
+            <a:ext cx="2926080" cy="365760"/>
           </a:xfrm>
           <a:prstGeom prst="rect">
             <a:avLst/>
@@ -10204,8 +10204,8 @@
         </p:nvSpPr>
         <p:spPr>
           <a:xfrm>
-            <a:off x="6553048" y="2967736"/>
-            <a:ext cx="4815688" cy="603504"/>
+            <a:off x="4663440" y="2905760"/>
+            <a:ext cx="2926080" cy="541528"/>
           </a:xfrm>
           <a:prstGeom prst="rect">
             <a:avLst/>
@@ -10221,7 +10221,7 @@
               <a:buNone/>
             </a:pPr>
             <a:r>
-              <a:rPr lang="en-US" sz="1800" dirty="0">
+              <a:rPr lang="en-US" sz="1600" dirty="0">
                 <a:solidFill>
                   <a:srgbClr val="1B1B1F"/>
                 </a:solidFill>
@@ -10229,7 +10229,7 @@
               <a:t>Kurze Texte: unzuverlässig – hier steht T für </a:t>
             </a:r>
             <a:r>
-              <a:rPr lang="en-US" sz="1800" b="1" dirty="0">
+              <a:rPr lang="en-US" sz="1600" b="1" dirty="0">
                 <a:solidFill>
                   <a:srgbClr val="1B1B1F"/>
                 </a:solidFill>
@@ -10237,14 +10237,14 @@
               <a:t>n</a:t>
             </a:r>
             <a:r>
-              <a:rPr lang="en-US" sz="1800" dirty="0">
+              <a:rPr lang="en-US" sz="1600" dirty="0">
                 <a:solidFill>
                   <a:srgbClr val="1B1B1F"/>
                 </a:solidFill>
               </a:rPr>
               <a:t> (k = 6)</a:t>
             </a:r>
-            <a:endParaRPr lang="en-US" sz="1800" dirty="0"/>
+            <a:endParaRPr lang="en-US" sz="1600" dirty="0"/>
           </a:p>
         </p:txBody>
       </p:sp>
@@ -10256,8 +10256,8 @@
         </p:nvSpPr>
         <p:spPr>
           <a:xfrm>
-            <a:off x="6553048" y="3699256"/>
-            <a:ext cx="4815688" cy="603504"/>
+            <a:off x="4663440" y="3575304"/>
+            <a:ext cx="2926080" cy="789432"/>
           </a:xfrm>
           <a:prstGeom prst="rect">
             <a:avLst/>
@@ -10273,7 +10273,7 @@
               <a:buNone/>
             </a:pPr>
             <a:r>
-              <a:rPr lang="en-US" sz="1800" dirty="0">
+              <a:rPr lang="en-US" sz="1600" dirty="0">
                 <a:solidFill>
                   <a:srgbClr val="1B1B1F"/>
                 </a:solidFill>
@@ -10281,7 +10281,7 @@
               <a:t>Transposition: Verteilung bleibt </a:t>
             </a:r>
             <a:r>
-              <a:rPr lang="en-US" sz="1800" b="1" dirty="0">
+              <a:rPr lang="en-US" sz="1600" b="1" dirty="0">
                 <a:solidFill>
                   <a:srgbClr val="1B1B1F"/>
                 </a:solidFill>
@@ -10289,14 +10289,14 @@
               <a:t>gleich</a:t>
             </a:r>
             <a:r>
-              <a:rPr lang="en-US" sz="1800" dirty="0">
+              <a:rPr lang="en-US" sz="1600" dirty="0">
                 <a:solidFill>
                   <a:srgbClr val="1B1B1F"/>
                 </a:solidFill>
               </a:rPr>
               <a:t> → Verfahrenstyp erkennbar, Schlüssel nicht</a:t>
             </a:r>
-            <a:endParaRPr lang="en-US" sz="1800" dirty="0"/>
+            <a:endParaRPr lang="en-US" sz="1600" dirty="0"/>
           </a:p>
         </p:txBody>
       </p:sp>
@@ -10308,8 +10308,8 @@
         </p:nvSpPr>
         <p:spPr>
           <a:xfrm>
-            <a:off x="6553048" y="4430776"/>
-            <a:ext cx="4815688" cy="603504"/>
+            <a:off x="4663440" y="4492752"/>
+            <a:ext cx="2926080" cy="789432"/>
           </a:xfrm>
           <a:prstGeom prst="rect">
             <a:avLst/>
@@ -10325,7 +10325,7 @@
               <a:buNone/>
             </a:pPr>
             <a:r>
-              <a:rPr lang="en-US" sz="1800" dirty="0">
+              <a:rPr lang="en-US" sz="1600" dirty="0">
                 <a:solidFill>
                   <a:srgbClr val="1B1B1F"/>
                 </a:solidFill>
@@ -10333,7 +10333,7 @@
               <a:t>Polyalphabetisch: Verteilung </a:t>
             </a:r>
             <a:r>
-              <a:rPr lang="en-US" sz="1800" b="1" dirty="0">
+              <a:rPr lang="en-US" sz="1600" b="1" dirty="0">
                 <a:solidFill>
                   <a:srgbClr val="1B1B1F"/>
                 </a:solidFill>
@@ -10341,14 +10341,14 @@
               <a:t>verwischt</a:t>
             </a:r>
             <a:r>
-              <a:rPr lang="en-US" sz="1800" dirty="0">
+              <a:rPr lang="en-US" sz="1600" dirty="0">
                 <a:solidFill>
                   <a:srgbClr val="1B1B1F"/>
                 </a:solidFill>
               </a:rPr>
               <a:t> → erst Teiltexte bilden (Video 03)</a:t>
             </a:r>
-            <a:endParaRPr lang="en-US" sz="1800" dirty="0"/>
+            <a:endParaRPr lang="en-US" sz="1600" dirty="0"/>
           </a:p>
         </p:txBody>
       </p:sp>
@@ -10360,8 +10360,8 @@
         </p:nvSpPr>
         <p:spPr>
           <a:xfrm>
-            <a:off x="6553048" y="5162296"/>
-            <a:ext cx="4815688" cy="603504"/>
+            <a:off x="4663440" y="5410200"/>
+            <a:ext cx="2926080" cy="541528"/>
           </a:xfrm>
           <a:prstGeom prst="rect">
             <a:avLst/>
@@ -10377,7 +10377,7 @@
               <a:buNone/>
             </a:pPr>
             <a:r>
-              <a:rPr lang="en-US" sz="1800" dirty="0">
+              <a:rPr lang="en-US" sz="1600" dirty="0">
                 <a:solidFill>
                   <a:srgbClr val="1B1B1F"/>
                 </a:solidFill>
@@ -10385,7 +10385,7 @@
               <a:t>Bigramm-Ersetzung: </a:t>
             </a:r>
             <a:r>
-              <a:rPr lang="en-US" sz="1800" b="1" dirty="0">
+              <a:rPr lang="en-US" sz="1600" b="1" dirty="0">
                 <a:solidFill>
                   <a:srgbClr val="1B1B1F"/>
                 </a:solidFill>
@@ -10393,14 +10393,14 @@
               <a:t>Paare</a:t>
             </a:r>
             <a:r>
-              <a:rPr lang="en-US" sz="1800" dirty="0">
+              <a:rPr lang="en-US" sz="1600" dirty="0">
                 <a:solidFill>
                   <a:srgbClr val="1B1B1F"/>
                 </a:solidFill>
               </a:rPr>
               <a:t> zählen statt Einzelbuchstaben</a:t>
             </a:r>
-            <a:endParaRPr lang="en-US" sz="1800" dirty="0"/>
+            <a:endParaRPr lang="en-US" sz="1600" dirty="0"/>
           </a:p>
         </p:txBody>
       </p:sp>
@@ -11480,7 +11480,7 @@
         <p:spPr>
           <a:xfrm>
             <a:off x="1097280" y="1508760"/>
-            <a:ext cx="9997135" cy="4663440"/>
+            <a:ext cx="6217920" cy="4663440"/>
           </a:xfrm>
           <a:prstGeom prst="roundRect">
             <a:avLst>
@@ -11546,7 +11546,7 @@
         <p:spPr>
           <a:xfrm>
             <a:off x="1508760" y="2240280"/>
-            <a:ext cx="9174175" cy="727456"/>
+            <a:ext cx="5394960" cy="665480"/>
           </a:xfrm>
           <a:prstGeom prst="rect">
             <a:avLst/>
@@ -11562,7 +11562,7 @@
               <a:buNone/>
             </a:pPr>
             <a:r>
-              <a:rPr lang="en-US" sz="2200" dirty="0">
+              <a:rPr lang="en-US" sz="2000" dirty="0">
                 <a:solidFill>
                   <a:srgbClr val="1B1B1F"/>
                 </a:solidFill>
@@ -11570,7 +11570,7 @@
               <a:t>Monoalphabetische Substitution: </a:t>
             </a:r>
             <a:r>
-              <a:rPr lang="en-US" sz="2200" b="1" dirty="0">
+              <a:rPr lang="en-US" sz="2000" b="1" dirty="0">
                 <a:solidFill>
                   <a:srgbClr val="1B1B1F"/>
                 </a:solidFill>
@@ -11578,14 +11578,14 @@
               <a:t>26!</a:t>
             </a:r>
             <a:r>
-              <a:rPr lang="en-US" sz="2200" dirty="0">
+              <a:rPr lang="en-US" sz="2000" dirty="0">
                 <a:solidFill>
                   <a:srgbClr val="1B1B1F"/>
                 </a:solidFill>
               </a:rPr>
               <a:t> Schlüssel – Brute Force unmöglich</a:t>
             </a:r>
-            <a:endParaRPr lang="en-US" sz="2200" dirty="0"/>
+            <a:endParaRPr lang="en-US" sz="2000" dirty="0"/>
           </a:p>
         </p:txBody>
       </p:sp>
@@ -11597,8 +11597,8 @@
         </p:nvSpPr>
         <p:spPr>
           <a:xfrm>
-            <a:off x="1508760" y="3095752"/>
-            <a:ext cx="9174175" cy="727456"/>
+            <a:off x="1508760" y="3033776"/>
+            <a:ext cx="5394960" cy="975360"/>
           </a:xfrm>
           <a:prstGeom prst="rect">
             <a:avLst/>
@@ -11614,7 +11614,7 @@
               <a:buNone/>
             </a:pPr>
             <a:r>
-              <a:rPr lang="en-US" sz="2200" dirty="0">
+              <a:rPr lang="en-US" sz="2000" dirty="0">
                 <a:solidFill>
                   <a:srgbClr val="1B1B1F"/>
                 </a:solidFill>
@@ -11622,7 +11622,7 @@
               <a:t>Aber die </a:t>
             </a:r>
             <a:r>
-              <a:rPr lang="en-US" sz="2200" b="1" dirty="0">
+              <a:rPr lang="en-US" sz="2000" b="1" dirty="0">
                 <a:solidFill>
                   <a:srgbClr val="1B1B1F"/>
                 </a:solidFill>
@@ -11630,14 +11630,14 @@
               <a:t>Häufigkeitsverteilung</a:t>
             </a:r>
             <a:r>
-              <a:rPr lang="en-US" sz="2200" dirty="0">
+              <a:rPr lang="en-US" sz="2000" dirty="0">
                 <a:solidFill>
                   <a:srgbClr val="1B1B1F"/>
                 </a:solidFill>
               </a:rPr>
               <a:t> bleibt erhalten: zählen, mit der Sprache vergleichen (e, n, …)</a:t>
             </a:r>
-            <a:endParaRPr lang="en-US" sz="2200" dirty="0"/>
+            <a:endParaRPr lang="en-US" sz="2000" dirty="0"/>
           </a:p>
         </p:txBody>
       </p:sp>
@@ -11649,8 +11649,8 @@
         </p:nvSpPr>
         <p:spPr>
           <a:xfrm>
-            <a:off x="1508760" y="3951224"/>
-            <a:ext cx="9174175" cy="727456"/>
+            <a:off x="1508760" y="4137152"/>
+            <a:ext cx="5394960" cy="665480"/>
           </a:xfrm>
           <a:prstGeom prst="rect">
             <a:avLst/>
@@ -11666,14 +11666,14 @@
               <a:buNone/>
             </a:pPr>
             <a:r>
-              <a:rPr lang="en-US" sz="2200" dirty="0">
+              <a:rPr lang="en-US" sz="2000" dirty="0">
                 <a:solidFill>
                   <a:srgbClr val="1B1B1F"/>
                 </a:solidFill>
               </a:rPr>
               <a:t>Paare, häufige Wörter und Kontext bestätigen und ergänzen die Zuordnung</a:t>
             </a:r>
-            <a:endParaRPr lang="en-US" sz="2200" dirty="0"/>
+            <a:endParaRPr lang="en-US" sz="2000" dirty="0"/>
           </a:p>
         </p:txBody>
       </p:sp>
@@ -11685,8 +11685,8 @@
         </p:nvSpPr>
         <p:spPr>
           <a:xfrm>
-            <a:off x="1508760" y="4806696"/>
-            <a:ext cx="9174175" cy="727456"/>
+            <a:off x="1508760" y="4930648"/>
+            <a:ext cx="5394960" cy="665480"/>
           </a:xfrm>
           <a:prstGeom prst="rect">
             <a:avLst/>
@@ -11702,7 +11702,7 @@
               <a:buNone/>
             </a:pPr>
             <a:r>
-              <a:rPr lang="en-US" sz="2200" dirty="0">
+              <a:rPr lang="en-US" sz="2000" dirty="0">
                 <a:solidFill>
                   <a:srgbClr val="1B1B1F"/>
                 </a:solidFill>
@@ -11710,7 +11710,7 @@
               <a:t>Grenzen: kurze Texte, Transposition, polyalphabetische Verfahren (</a:t>
             </a:r>
             <a:r>
-              <a:rPr lang="en-US" sz="2200" b="1" dirty="0">
+              <a:rPr lang="en-US" sz="2000" b="1" dirty="0">
                 <a:solidFill>
                   <a:srgbClr val="1B1B1F"/>
                 </a:solidFill>
@@ -11718,14 +11718,14 @@
               <a:t>P6</a:t>
             </a:r>
             <a:r>
-              <a:rPr lang="en-US" sz="2200" dirty="0">
+              <a:rPr lang="en-US" sz="2000" dirty="0">
                 <a:solidFill>
                   <a:srgbClr val="1B1B1F"/>
                 </a:solidFill>
               </a:rPr>
               <a:t>)</a:t>
             </a:r>
-            <a:endParaRPr lang="en-US" sz="2200" dirty="0"/>
+            <a:endParaRPr lang="en-US" sz="2000" dirty="0"/>
           </a:p>
         </p:txBody>
       </p:sp>
@@ -18866,79 +18866,33 @@
           </a:p>
         </p:txBody>
       </p:sp>
-      <p:sp>
-        <p:nvSpPr>
-          <p:cNvPr id="3" name="Bildplatzhalter"/>
-          <p:cNvSpPr/>
+      <p:pic>
+        <p:nvPicPr>
+          <p:cNvPr id="3" name="Image 0" descr="Stilisierte Seite einer arabischen Handschrift (keine echte Faksimile-Abbildung, nichts Lesbares) mit Girih-Stern-Ornament in Lapis und Gold; Beschriftung „Bagdad, 9. Jahrhundert“">    </p:cNvPr>
+          <p:cNvPicPr>
+            <a:picLocks noChangeAspect="1"/>
+          </p:cNvPicPr>
           <p:nvPr/>
-        </p:nvSpPr>
+        </p:nvPicPr>
+        <p:blipFill>
+          <a:blip r:embed="rId1"/>
+          <a:stretch>
+            <a:fillRect/>
+          </a:stretch>
+        </p:blipFill>
         <p:spPr>
           <a:xfrm>
             <a:off x="548640" y="1325880"/>
-            <a:ext cx="4308653" cy="2926080"/>
+            <a:ext cx="4308653" cy="2423617"/>
           </a:xfrm>
           <a:prstGeom prst="rect">
             <a:avLst/>
           </a:prstGeom>
-          <a:solidFill>
-            <a:srgbClr val="FFFFFF"/>
-          </a:solidFill>
-          <a:ln w="15875">
-            <a:solidFill>
-              <a:srgbClr val="4A4A55"/>
-            </a:solidFill>
-            <a:prstDash val="dash"/>
-          </a:ln>
         </p:spPr>
-      </p:sp>
+      </p:pic>
       <p:sp>
         <p:nvSpPr>
-          <p:cNvPr id="4" name="Text 2"/>
-          <p:cNvSpPr txBox="1"/>
-          <p:nvPr/>
-        </p:nvSpPr>
-        <p:spPr>
-          <a:xfrm>
-            <a:off x="822960" y="1600200"/>
-            <a:ext cx="3760013" cy="2377440"/>
-          </a:xfrm>
-          <a:prstGeom prst="rect">
-            <a:avLst/>
-          </a:prstGeom>
-          <a:noFill/>
-          <a:ln/>
-        </p:spPr>
-        <p:txBody>
-          <a:bodyPr wrap="square" lIns="0" tIns="0" rIns="0" bIns="0" rtlCol="0" anchor="ctr"/>
-          <a:lstStyle/>
-          <a:p>
-            <a:pPr algn="ctr" indent="0" marL="0">
-              <a:buNone/>
-            </a:pPr>
-            <a:r>
-              <a:rPr lang="en-US" sz="1400" b="1" spc="200" kern="0" dirty="0">
-                <a:solidFill>
-                  <a:srgbClr val="4A4A55"/>
-                </a:solidFill>
-              </a:rPr>
-              <a:t>BILD EINFÜGEN
-</a:t>
-            </a:r>
-            <a:r>
-              <a:rPr lang="en-US" sz="1400" dirty="0">
-                <a:solidFill>
-                  <a:srgbClr val="4A4A55"/>
-                </a:solidFill>
-              </a:rPr>
-              <a:t>Stilisierte Seite einer arabischen Handschrift (keine echte Faksimile-Abbildung, nichts Lesbares) mit Girih-Stern-Ornament in Lapis und Gold; Beschriftung „Bagdad, 9. Jahrhundert“</a:t>
-            </a:r>
-            <a:endParaRPr lang="en-US" sz="1400" dirty="0"/>
-          </a:p>
-        </p:txBody>
-      </p:sp>
-      <p:sp>
-        <p:nvSpPr>
-          <p:cNvPr id="5" name="Shape 3"/>
+          <p:cNvPr id="4" name="Shape 1"/>
           <p:cNvSpPr/>
           <p:nvPr/>
         </p:nvSpPr>
@@ -18965,7 +18919,7 @@
       </p:sp>
       <p:sp>
         <p:nvSpPr>
-          <p:cNvPr id="6" name="Text 4"/>
+          <p:cNvPr id="5" name="Text 2"/>
           <p:cNvSpPr txBox="1"/>
           <p:nvPr/>
         </p:nvSpPr>
@@ -18990,7 +18944,7 @@
             <a:r>
               <a:rPr lang="en-US" sz="1300" b="1" spc="200" kern="0" dirty="0">
                 <a:solidFill>
-                  <a:srgbClr val="1F4E8C"/>
+                  <a:srgbClr val="14213D"/>
                 </a:solidFill>
               </a:rPr>
               <a:t>DIE IDEE</a:t>
@@ -19001,7 +18955,7 @@
       </p:sp>
       <p:sp>
         <p:nvSpPr>
-          <p:cNvPr id="7" name="Text 5"/>
+          <p:cNvPr id="6" name="Text 3"/>
           <p:cNvSpPr txBox="1"/>
           <p:nvPr/>
         </p:nvSpPr>
@@ -19053,7 +19007,7 @@
       </p:sp>
       <p:sp>
         <p:nvSpPr>
-          <p:cNvPr id="8" name="Text 6"/>
+          <p:cNvPr id="7" name="Text 4"/>
           <p:cNvSpPr txBox="1"/>
           <p:nvPr/>
         </p:nvSpPr>
@@ -19121,7 +19075,7 @@
       </p:sp>
       <p:sp>
         <p:nvSpPr>
-          <p:cNvPr id="9" name="Text 7"/>
+          <p:cNvPr id="8" name="Text 5"/>
           <p:cNvSpPr txBox="1"/>
           <p:nvPr/>
         </p:nvSpPr>
@@ -19165,7 +19119,7 @@
       </p:sp>
       <p:sp>
         <p:nvSpPr>
-          <p:cNvPr id="10" name="Text 8"/>
+          <p:cNvPr id="9" name="Text 6"/>
           <p:cNvSpPr txBox="1"/>
           <p:nvPr/>
         </p:nvSpPr>
@@ -19754,7 +19708,7 @@
             <a:r>
               <a:rPr lang="en-US" sz="1300" b="1" spc="200" kern="0" dirty="0">
                 <a:solidFill>
-                  <a:srgbClr val="1F4E8C"/>
+                  <a:srgbClr val="14213D"/>
                 </a:solidFill>
               </a:rPr>
               <a:t>VERGLEICH</a:t>
@@ -20104,7 +20058,7 @@
                         <a:buNone/>
                       </a:pPr>
                       <a:r>
-                        <a:rPr lang="en-US" sz="1600" b="1" dirty="0">
+                        <a:rPr lang="en-US" sz="1700" b="1" dirty="0">
                           <a:solidFill>
                             <a:srgbClr val="1B1B1F"/>
                           </a:solidFill>
@@ -20114,7 +20068,7 @@
                         </a:rPr>
                         <a:t>Geheimtext</a:t>
                       </a:r>
-                      <a:endParaRPr lang="en-US" sz="1600" dirty="0">
+                      <a:endParaRPr lang="en-US" sz="1700" dirty="0">
                         <a:latin typeface="Calibri" charset="0"/>
                         <a:ea typeface="Calibri" charset="0"/>
                         <a:cs typeface="Calibri" charset="0"/>
@@ -20172,7 +20126,7 @@
                         <a:buNone/>
                       </a:pPr>
                       <a:r>
-                        <a:rPr lang="en-US" sz="1600" b="1" dirty="0">
+                        <a:rPr lang="en-US" sz="1700" b="1" dirty="0">
                           <a:solidFill>
                             <a:srgbClr val="1B1B1F"/>
                           </a:solidFill>
@@ -20182,7 +20136,7 @@
                         </a:rPr>
                         <a:t>Anzahl</a:t>
                       </a:r>
-                      <a:endParaRPr lang="en-US" sz="1600" dirty="0">
+                      <a:endParaRPr lang="en-US" sz="1700" dirty="0">
                         <a:latin typeface="Calibri" charset="0"/>
                         <a:ea typeface="Calibri" charset="0"/>
                         <a:cs typeface="Calibri" charset="0"/>
@@ -20240,7 +20194,7 @@
                         <a:buNone/>
                       </a:pPr>
                       <a:r>
-                        <a:rPr lang="en-US" sz="1600" b="1" dirty="0">
+                        <a:rPr lang="en-US" sz="1700" b="1" dirty="0">
                           <a:solidFill>
                             <a:srgbClr val="1B1B1F"/>
                           </a:solidFill>
@@ -20250,7 +20204,7 @@
                         </a:rPr>
                         <a:t>Klartext</a:t>
                       </a:r>
-                      <a:endParaRPr lang="en-US" sz="1600" dirty="0">
+                      <a:endParaRPr lang="en-US" sz="1700" dirty="0">
                         <a:latin typeface="Calibri" charset="0"/>
                         <a:ea typeface="Calibri" charset="0"/>
                         <a:cs typeface="Calibri" charset="0"/>
@@ -20308,7 +20262,7 @@
                         <a:buNone/>
                       </a:pPr>
                       <a:r>
-                        <a:rPr lang="en-US" sz="1600" b="1" dirty="0">
+                        <a:rPr lang="en-US" sz="1700" b="1" dirty="0">
                           <a:solidFill>
                             <a:srgbClr val="1B1B1F"/>
                           </a:solidFill>
@@ -20318,7 +20272,7 @@
                         </a:rPr>
                         <a:t>Folgerung</a:t>
                       </a:r>
-                      <a:endParaRPr lang="en-US" sz="1600" dirty="0">
+                      <a:endParaRPr lang="en-US" sz="1700" dirty="0">
                         <a:latin typeface="Calibri" charset="0"/>
                         <a:ea typeface="Calibri" charset="0"/>
                         <a:cs typeface="Calibri" charset="0"/>
@@ -20378,7 +20332,7 @@
                         <a:buNone/>
                       </a:pPr>
                       <a:r>
-                        <a:rPr lang="en-US" sz="1600" dirty="0">
+                        <a:rPr lang="en-US" sz="1700" dirty="0">
                           <a:solidFill>
                             <a:srgbClr val="1B1B1F"/>
                           </a:solidFill>
@@ -20388,7 +20342,7 @@
                         </a:rPr>
                         <a:t>RL</a:t>
                       </a:r>
-                      <a:endParaRPr lang="en-US" sz="1600" dirty="0">
+                      <a:endParaRPr lang="en-US" sz="1700" dirty="0">
                         <a:latin typeface="Calibri" charset="0"/>
                         <a:ea typeface="Calibri" charset="0"/>
                         <a:cs typeface="Calibri" charset="0"/>
@@ -20446,7 +20400,7 @@
                         <a:buNone/>
                       </a:pPr>
                       <a:r>
-                        <a:rPr lang="en-US" sz="1600" dirty="0">
+                        <a:rPr lang="en-US" sz="1700" dirty="0">
                           <a:solidFill>
                             <a:srgbClr val="1B1B1F"/>
                           </a:solidFill>
@@ -20456,7 +20410,7 @@
                         </a:rPr>
                         <a:t>17</a:t>
                       </a:r>
-                      <a:endParaRPr lang="en-US" sz="1600" dirty="0">
+                      <a:endParaRPr lang="en-US" sz="1700" dirty="0">
                         <a:latin typeface="Calibri" charset="0"/>
                         <a:ea typeface="Calibri" charset="0"/>
                         <a:cs typeface="Calibri" charset="0"/>
@@ -20514,7 +20468,7 @@
                         <a:buNone/>
                       </a:pPr>
                       <a:r>
-                        <a:rPr lang="en-US" sz="1600" dirty="0">
+                        <a:rPr lang="en-US" sz="1700" dirty="0">
                           <a:solidFill>
                             <a:srgbClr val="1B1B1F"/>
                           </a:solidFill>
@@ -20524,7 +20478,7 @@
                         </a:rPr>
                         <a:t>en</a:t>
                       </a:r>
-                      <a:endParaRPr lang="en-US" sz="1600" dirty="0">
+                      <a:endParaRPr lang="en-US" sz="1700" dirty="0">
                         <a:latin typeface="Calibri" charset="0"/>
                         <a:ea typeface="Calibri" charset="0"/>
                         <a:cs typeface="Calibri" charset="0"/>
@@ -20582,7 +20536,7 @@
                         <a:buNone/>
                       </a:pPr>
                       <a:r>
-                        <a:rPr lang="en-US" sz="1600" dirty="0">
+                        <a:rPr lang="en-US" sz="1700" dirty="0">
                           <a:solidFill>
                             <a:srgbClr val="1B1B1F"/>
                           </a:solidFill>
@@ -20593,7 +20547,7 @@
                         <a:t>R = e, L = n passt: </a:t>
                       </a:r>
                       <a:r>
-                        <a:rPr lang="en-US" sz="1600" b="1" dirty="0">
+                        <a:rPr lang="en-US" sz="1700" b="1" dirty="0">
                           <a:solidFill>
                             <a:srgbClr val="1B1B1F"/>
                           </a:solidFill>
@@ -20604,7 +20558,7 @@
                         <a:t>en</a:t>
                       </a:r>
                       <a:r>
-                        <a:rPr lang="en-US" sz="1600" dirty="0">
+                        <a:rPr lang="en-US" sz="1700" dirty="0">
                           <a:solidFill>
                             <a:srgbClr val="1B1B1F"/>
                           </a:solidFill>
@@ -20614,7 +20568,7 @@
                         </a:rPr>
                         <a:t> ist eines der häufigsten Paare</a:t>
                       </a:r>
-                      <a:endParaRPr lang="en-US" sz="1600" dirty="0">
+                      <a:endParaRPr lang="en-US" sz="1700" dirty="0">
                         <a:latin typeface="Calibri" charset="0"/>
                         <a:ea typeface="Calibri" charset="0"/>
                         <a:cs typeface="Calibri" charset="0"/>
@@ -20674,7 +20628,7 @@
                         <a:buNone/>
                       </a:pPr>
                       <a:r>
-                        <a:rPr lang="en-US" sz="1600" dirty="0">
+                        <a:rPr lang="en-US" sz="1700" dirty="0">
                           <a:solidFill>
                             <a:srgbClr val="1B1B1F"/>
                           </a:solidFill>
@@ -20684,7 +20638,7 @@
                         </a:rPr>
                         <a:t>RP</a:t>
                       </a:r>
-                      <a:endParaRPr lang="en-US" sz="1600" dirty="0">
+                      <a:endParaRPr lang="en-US" sz="1700" dirty="0">
                         <a:latin typeface="Calibri" charset="0"/>
                         <a:ea typeface="Calibri" charset="0"/>
                         <a:cs typeface="Calibri" charset="0"/>
@@ -20742,7 +20696,7 @@
                         <a:buNone/>
                       </a:pPr>
                       <a:r>
-                        <a:rPr lang="en-US" sz="1600" dirty="0">
+                        <a:rPr lang="en-US" sz="1700" dirty="0">
                           <a:solidFill>
                             <a:srgbClr val="1B1B1F"/>
                           </a:solidFill>
@@ -20752,7 +20706,7 @@
                         </a:rPr>
                         <a:t>14</a:t>
                       </a:r>
-                      <a:endParaRPr lang="en-US" sz="1600" dirty="0">
+                      <a:endParaRPr lang="en-US" sz="1700" dirty="0">
                         <a:latin typeface="Calibri" charset="0"/>
                         <a:ea typeface="Calibri" charset="0"/>
                         <a:cs typeface="Calibri" charset="0"/>
@@ -20810,7 +20764,7 @@
                         <a:buNone/>
                       </a:pPr>
                       <a:r>
-                        <a:rPr lang="en-US" sz="1600" dirty="0">
+                        <a:rPr lang="en-US" sz="1700" dirty="0">
                           <a:solidFill>
                             <a:srgbClr val="1B1B1F"/>
                           </a:solidFill>
@@ -20820,7 +20774,7 @@
                         </a:rPr>
                         <a:t>er</a:t>
                       </a:r>
-                      <a:endParaRPr lang="en-US" sz="1600" dirty="0">
+                      <a:endParaRPr lang="en-US" sz="1700" dirty="0">
                         <a:latin typeface="Calibri" charset="0"/>
                         <a:ea typeface="Calibri" charset="0"/>
                         <a:cs typeface="Calibri" charset="0"/>
@@ -20878,7 +20832,7 @@
                         <a:buNone/>
                       </a:pPr>
                       <a:r>
-                        <a:rPr lang="en-US" sz="1600" dirty="0">
+                        <a:rPr lang="en-US" sz="1700" dirty="0">
                           <a:solidFill>
                             <a:srgbClr val="1B1B1F"/>
                           </a:solidFill>
@@ -20889,7 +20843,7 @@
                         <a:t>→ </a:t>
                       </a:r>
                       <a:r>
-                        <a:rPr lang="en-US" sz="1600" b="1" dirty="0">
+                        <a:rPr lang="en-US" sz="1700" b="1" dirty="0">
                           <a:solidFill>
                             <a:srgbClr val="1B1B1F"/>
                           </a:solidFill>
@@ -20899,7 +20853,7 @@
                         </a:rPr>
                         <a:t>P = r</a:t>
                       </a:r>
-                      <a:endParaRPr lang="en-US" sz="1600" dirty="0">
+                      <a:endParaRPr lang="en-US" sz="1700" dirty="0">
                         <a:latin typeface="Calibri" charset="0"/>
                         <a:ea typeface="Calibri" charset="0"/>
                         <a:cs typeface="Calibri" charset="0"/>
@@ -20959,7 +20913,7 @@
                         <a:buNone/>
                       </a:pPr>
                       <a:r>
-                        <a:rPr lang="en-US" sz="1600" dirty="0">
+                        <a:rPr lang="en-US" sz="1700" dirty="0">
                           <a:solidFill>
                             <a:srgbClr val="1B1B1F"/>
                           </a:solidFill>
@@ -20969,7 +20923,7 @@
                         </a:rPr>
                         <a:t>DR · RD</a:t>
                       </a:r>
-                      <a:endParaRPr lang="en-US" sz="1600" dirty="0">
+                      <a:endParaRPr lang="en-US" sz="1700" dirty="0">
                         <a:latin typeface="Calibri" charset="0"/>
                         <a:ea typeface="Calibri" charset="0"/>
                         <a:cs typeface="Calibri" charset="0"/>
@@ -21027,7 +20981,7 @@
                         <a:buNone/>
                       </a:pPr>
                       <a:r>
-                        <a:rPr lang="en-US" sz="1600" dirty="0">
+                        <a:rPr lang="en-US" sz="1700" dirty="0">
                           <a:solidFill>
                             <a:srgbClr val="1B1B1F"/>
                           </a:solidFill>
@@ -21037,7 +20991,7 @@
                         </a:rPr>
                         <a:t>7 · 6</a:t>
                       </a:r>
-                      <a:endParaRPr lang="en-US" sz="1600" dirty="0">
+                      <a:endParaRPr lang="en-US" sz="1700" dirty="0">
                         <a:latin typeface="Calibri" charset="0"/>
                         <a:ea typeface="Calibri" charset="0"/>
                         <a:cs typeface="Calibri" charset="0"/>
@@ -21095,7 +21049,7 @@
                         <a:buNone/>
                       </a:pPr>
                       <a:r>
-                        <a:rPr lang="en-US" sz="1600" dirty="0">
+                        <a:rPr lang="en-US" sz="1700" dirty="0">
                           <a:solidFill>
                             <a:srgbClr val="1B1B1F"/>
                           </a:solidFill>
@@ -21105,7 +21059,7 @@
                         </a:rPr>
                         <a:t>ie · ei</a:t>
                       </a:r>
-                      <a:endParaRPr lang="en-US" sz="1600" dirty="0">
+                      <a:endParaRPr lang="en-US" sz="1700" dirty="0">
                         <a:latin typeface="Calibri" charset="0"/>
                         <a:ea typeface="Calibri" charset="0"/>
                         <a:cs typeface="Calibri" charset="0"/>
@@ -21163,7 +21117,7 @@
                         <a:buNone/>
                       </a:pPr>
                       <a:r>
-                        <a:rPr lang="en-US" sz="1600" dirty="0">
+                        <a:rPr lang="en-US" sz="1700" dirty="0">
                           <a:solidFill>
                             <a:srgbClr val="1B1B1F"/>
                           </a:solidFill>
@@ -21174,7 +21128,7 @@
                         <a:t>→ </a:t>
                       </a:r>
                       <a:r>
-                        <a:rPr lang="en-US" sz="1600" b="1" dirty="0">
+                        <a:rPr lang="en-US" sz="1700" b="1" dirty="0">
                           <a:solidFill>
                             <a:srgbClr val="1B1B1F"/>
                           </a:solidFill>
@@ -21184,7 +21138,7 @@
                         </a:rPr>
                         <a:t>D = i</a:t>
                       </a:r>
-                      <a:endParaRPr lang="en-US" sz="1600" dirty="0">
+                      <a:endParaRPr lang="en-US" sz="1700" dirty="0">
                         <a:latin typeface="Calibri" charset="0"/>
                         <a:ea typeface="Calibri" charset="0"/>
                         <a:cs typeface="Calibri" charset="0"/>
@@ -21244,7 +21198,7 @@
                         <a:buNone/>
                       </a:pPr>
                       <a:r>
-                        <a:rPr lang="en-US" sz="1600" dirty="0">
+                        <a:rPr lang="en-US" sz="1700" dirty="0">
                           <a:solidFill>
                             <a:srgbClr val="1B1B1F"/>
                           </a:solidFill>
@@ -21254,7 +21208,7 @@
                         </a:rPr>
                         <a:t>EDR</a:t>
                       </a:r>
-                      <a:endParaRPr lang="en-US" sz="1600" dirty="0">
+                      <a:endParaRPr lang="en-US" sz="1700" dirty="0">
                         <a:latin typeface="Calibri" charset="0"/>
                         <a:ea typeface="Calibri" charset="0"/>
                         <a:cs typeface="Calibri" charset="0"/>
@@ -21312,7 +21266,7 @@
                         <a:buNone/>
                       </a:pPr>
                       <a:r>
-                        <a:rPr lang="en-US" sz="1600" dirty="0">
+                        <a:rPr lang="en-US" sz="1700" dirty="0">
                           <a:solidFill>
                             <a:srgbClr val="1B1B1F"/>
                           </a:solidFill>
@@ -21322,7 +21276,7 @@
                         </a:rPr>
                         <a:t>4 (Dreiergruppe)</a:t>
                       </a:r>
-                      <a:endParaRPr lang="en-US" sz="1600" dirty="0">
+                      <a:endParaRPr lang="en-US" sz="1700" dirty="0">
                         <a:latin typeface="Calibri" charset="0"/>
                         <a:ea typeface="Calibri" charset="0"/>
                         <a:cs typeface="Calibri" charset="0"/>
@@ -21380,7 +21334,7 @@
                         <a:buNone/>
                       </a:pPr>
                       <a:r>
-                        <a:rPr lang="en-US" sz="1600" dirty="0">
+                        <a:rPr lang="en-US" sz="1700" dirty="0">
                           <a:solidFill>
                             <a:srgbClr val="1B1B1F"/>
                           </a:solidFill>
@@ -21390,7 +21344,7 @@
                         </a:rPr>
                         <a:t>die</a:t>
                       </a:r>
-                      <a:endParaRPr lang="en-US" sz="1600" dirty="0">
+                      <a:endParaRPr lang="en-US" sz="1700" dirty="0">
                         <a:latin typeface="Calibri" charset="0"/>
                         <a:ea typeface="Calibri" charset="0"/>
                         <a:cs typeface="Calibri" charset="0"/>
@@ -21448,7 +21402,7 @@
                         <a:buNone/>
                       </a:pPr>
                       <a:r>
-                        <a:rPr lang="en-US" sz="1600" dirty="0">
+                        <a:rPr lang="en-US" sz="1700" dirty="0">
                           <a:solidFill>
                             <a:srgbClr val="1B1B1F"/>
                           </a:solidFill>
@@ -21459,7 +21413,7 @@
                         <a:t>→ </a:t>
                       </a:r>
                       <a:r>
-                        <a:rPr lang="en-US" sz="1600" b="1" dirty="0">
+                        <a:rPr lang="en-US" sz="1700" b="1" dirty="0">
                           <a:solidFill>
                             <a:srgbClr val="1B1B1F"/>
                           </a:solidFill>
@@ -21469,7 +21423,7 @@
                         </a:rPr>
                         <a:t>E = d</a:t>
                       </a:r>
-                      <a:endParaRPr lang="en-US" sz="1600" dirty="0">
+                      <a:endParaRPr lang="en-US" sz="1700" dirty="0">
                         <a:latin typeface="Calibri" charset="0"/>
                         <a:ea typeface="Calibri" charset="0"/>
                         <a:cs typeface="Calibri" charset="0"/>
@@ -22468,7 +22422,7 @@
                         <a:buNone/>
                       </a:pPr>
                       <a:r>
-                        <a:rPr lang="en-US" sz="1300" b="1" dirty="0">
+                        <a:rPr lang="en-US" sz="2000" b="1" dirty="0">
                           <a:solidFill>
                             <a:srgbClr val="1B1B1F"/>
                           </a:solidFill>
@@ -22478,7 +22432,7 @@
                         </a:rPr>
                         <a:t>Geheimtext</a:t>
                       </a:r>
-                      <a:endParaRPr lang="en-US" sz="1300" dirty="0">
+                      <a:endParaRPr lang="en-US" sz="2000" dirty="0">
                         <a:latin typeface="Calibri" charset="0"/>
                         <a:ea typeface="Calibri" charset="0"/>
                         <a:cs typeface="Calibri" charset="0"/>
@@ -22536,7 +22490,7 @@
                         <a:buNone/>
                       </a:pPr>
                       <a:r>
-                        <a:rPr lang="en-US" sz="1300" b="1" dirty="0">
+                        <a:rPr lang="en-US" sz="2000" b="1" dirty="0">
                           <a:solidFill>
                             <a:srgbClr val="1B1B1F"/>
                           </a:solidFill>
@@ -22546,7 +22500,7 @@
                         </a:rPr>
                         <a:t>T</a:t>
                       </a:r>
-                      <a:endParaRPr lang="en-US" sz="1300" dirty="0">
+                      <a:endParaRPr lang="en-US" sz="2000" dirty="0">
                         <a:latin typeface="Calibri" charset="0"/>
                         <a:ea typeface="Calibri" charset="0"/>
                         <a:cs typeface="Calibri" charset="0"/>
@@ -22604,7 +22558,7 @@
                         <a:buNone/>
                       </a:pPr>
                       <a:r>
-                        <a:rPr lang="en-US" sz="1300" b="1" dirty="0">
+                        <a:rPr lang="en-US" sz="2000" b="1" dirty="0">
                           <a:solidFill>
                             <a:srgbClr val="1B1B1F"/>
                           </a:solidFill>
@@ -22614,7 +22568,7 @@
                         </a:rPr>
                         <a:t>Z</a:t>
                       </a:r>
-                      <a:endParaRPr lang="en-US" sz="1300" dirty="0">
+                      <a:endParaRPr lang="en-US" sz="2000" dirty="0">
                         <a:latin typeface="Calibri" charset="0"/>
                         <a:ea typeface="Calibri" charset="0"/>
                         <a:cs typeface="Calibri" charset="0"/>
@@ -22672,7 +22626,7 @@
                         <a:buNone/>
                       </a:pPr>
                       <a:r>
-                        <a:rPr lang="en-US" sz="1300" b="1" dirty="0">
+                        <a:rPr lang="en-US" sz="2000" b="1" dirty="0">
                           <a:solidFill>
                             <a:srgbClr val="1B1B1F"/>
                           </a:solidFill>
@@ -22682,7 +22636,7 @@
                         </a:rPr>
                         <a:t>I</a:t>
                       </a:r>
-                      <a:endParaRPr lang="en-US" sz="1300" dirty="0">
+                      <a:endParaRPr lang="en-US" sz="2000" dirty="0">
                         <a:latin typeface="Calibri" charset="0"/>
                         <a:ea typeface="Calibri" charset="0"/>
                         <a:cs typeface="Calibri" charset="0"/>
@@ -22740,7 +22694,7 @@
                         <a:buNone/>
                       </a:pPr>
                       <a:r>
-                        <a:rPr lang="en-US" sz="1300" b="1" dirty="0">
+                        <a:rPr lang="en-US" sz="2000" b="1" dirty="0">
                           <a:solidFill>
                             <a:srgbClr val="1B1B1F"/>
                           </a:solidFill>
@@ -22750,7 +22704,7 @@
                         </a:rPr>
                         <a:t>Q</a:t>
                       </a:r>
-                      <a:endParaRPr lang="en-US" sz="1300" dirty="0">
+                      <a:endParaRPr lang="en-US" sz="2000" dirty="0">
                         <a:latin typeface="Calibri" charset="0"/>
                         <a:ea typeface="Calibri" charset="0"/>
                         <a:cs typeface="Calibri" charset="0"/>
@@ -22808,7 +22762,7 @@
                         <a:buNone/>
                       </a:pPr>
                       <a:r>
-                        <a:rPr lang="en-US" sz="1300" b="1" dirty="0">
+                        <a:rPr lang="en-US" sz="2000" b="1" dirty="0">
                           <a:solidFill>
                             <a:srgbClr val="1B1B1F"/>
                           </a:solidFill>
@@ -22818,7 +22772,7 @@
                         </a:rPr>
                         <a:t>F</a:t>
                       </a:r>
-                      <a:endParaRPr lang="en-US" sz="1300" dirty="0">
+                      <a:endParaRPr lang="en-US" sz="2000" dirty="0">
                         <a:latin typeface="Calibri" charset="0"/>
                         <a:ea typeface="Calibri" charset="0"/>
                         <a:cs typeface="Calibri" charset="0"/>
@@ -22876,7 +22830,7 @@
                         <a:buNone/>
                       </a:pPr>
                       <a:r>
-                        <a:rPr lang="en-US" sz="1300" b="1" dirty="0">
+                        <a:rPr lang="en-US" sz="2000" b="1" dirty="0">
                           <a:solidFill>
                             <a:srgbClr val="1B1B1F"/>
                           </a:solidFill>
@@ -22886,7 +22840,7 @@
                         </a:rPr>
                         <a:t>C</a:t>
                       </a:r>
-                      <a:endParaRPr lang="en-US" sz="1300" dirty="0">
+                      <a:endParaRPr lang="en-US" sz="2000" dirty="0">
                         <a:latin typeface="Calibri" charset="0"/>
                         <a:ea typeface="Calibri" charset="0"/>
                         <a:cs typeface="Calibri" charset="0"/>
@@ -22944,7 +22898,7 @@
                         <a:buNone/>
                       </a:pPr>
                       <a:r>
-                        <a:rPr lang="en-US" sz="1300" b="1" dirty="0">
+                        <a:rPr lang="en-US" sz="2000" b="1" dirty="0">
                           <a:solidFill>
                             <a:srgbClr val="1B1B1F"/>
                           </a:solidFill>
@@ -22954,7 +22908,7 @@
                         </a:rPr>
                         <a:t>A</a:t>
                       </a:r>
-                      <a:endParaRPr lang="en-US" sz="1300" dirty="0">
+                      <a:endParaRPr lang="en-US" sz="2000" dirty="0">
                         <a:latin typeface="Calibri" charset="0"/>
                         <a:ea typeface="Calibri" charset="0"/>
                         <a:cs typeface="Calibri" charset="0"/>
@@ -23012,7 +22966,7 @@
                         <a:buNone/>
                       </a:pPr>
                       <a:r>
-                        <a:rPr lang="en-US" sz="1300" b="1" dirty="0">
+                        <a:rPr lang="en-US" sz="2000" b="1" dirty="0">
                           <a:solidFill>
                             <a:srgbClr val="1B1B1F"/>
                           </a:solidFill>
@@ -23022,7 +22976,7 @@
                         </a:rPr>
                         <a:t>S</a:t>
                       </a:r>
-                      <a:endParaRPr lang="en-US" sz="1300" dirty="0">
+                      <a:endParaRPr lang="en-US" sz="2000" dirty="0">
                         <a:latin typeface="Calibri" charset="0"/>
                         <a:ea typeface="Calibri" charset="0"/>
                         <a:cs typeface="Calibri" charset="0"/>
@@ -23080,7 +23034,7 @@
                         <a:buNone/>
                       </a:pPr>
                       <a:r>
-                        <a:rPr lang="en-US" sz="1300" b="1" dirty="0">
+                        <a:rPr lang="en-US" sz="2000" b="1" dirty="0">
                           <a:solidFill>
                             <a:srgbClr val="1B1B1F"/>
                           </a:solidFill>
@@ -23090,7 +23044,7 @@
                         </a:rPr>
                         <a:t>J</a:t>
                       </a:r>
-                      <a:endParaRPr lang="en-US" sz="1300" dirty="0">
+                      <a:endParaRPr lang="en-US" sz="2000" dirty="0">
                         <a:latin typeface="Calibri" charset="0"/>
                         <a:ea typeface="Calibri" charset="0"/>
                         <a:cs typeface="Calibri" charset="0"/>
@@ -23148,7 +23102,7 @@
                         <a:buNone/>
                       </a:pPr>
                       <a:r>
-                        <a:rPr lang="en-US" sz="1300" b="1" dirty="0">
+                        <a:rPr lang="en-US" sz="2000" b="1" dirty="0">
                           <a:solidFill>
                             <a:srgbClr val="1B1B1F"/>
                           </a:solidFill>
@@ -23158,7 +23112,7 @@
                         </a:rPr>
                         <a:t>B</a:t>
                       </a:r>
-                      <a:endParaRPr lang="en-US" sz="1300" dirty="0">
+                      <a:endParaRPr lang="en-US" sz="2000" dirty="0">
                         <a:latin typeface="Calibri" charset="0"/>
                         <a:ea typeface="Calibri" charset="0"/>
                         <a:cs typeface="Calibri" charset="0"/>
@@ -23218,7 +23172,7 @@
                         <a:buNone/>
                       </a:pPr>
                       <a:r>
-                        <a:rPr lang="en-US" sz="1300" dirty="0">
+                        <a:rPr lang="en-US" sz="2000" dirty="0">
                           <a:solidFill>
                             <a:srgbClr val="1B1B1F"/>
                           </a:solidFill>
@@ -23228,7 +23182,7 @@
                         </a:rPr>
                         <a:t>Klartext</a:t>
                       </a:r>
-                      <a:endParaRPr lang="en-US" sz="1300" dirty="0">
+                      <a:endParaRPr lang="en-US" sz="2000" dirty="0">
                         <a:latin typeface="Calibri" charset="0"/>
                         <a:ea typeface="Calibri" charset="0"/>
                         <a:cs typeface="Calibri" charset="0"/>
@@ -23286,7 +23240,7 @@
                         <a:buNone/>
                       </a:pPr>
                       <a:r>
-                        <a:rPr lang="en-US" sz="1300" dirty="0">
+                        <a:rPr lang="en-US" sz="2000" dirty="0">
                           <a:solidFill>
                             <a:srgbClr val="1B1B1F"/>
                           </a:solidFill>
@@ -23296,7 +23250,7 @@
                         </a:rPr>
                         <a:t>u</a:t>
                       </a:r>
-                      <a:endParaRPr lang="en-US" sz="1300" dirty="0">
+                      <a:endParaRPr lang="en-US" sz="2000" dirty="0">
                         <a:latin typeface="Calibri" charset="0"/>
                         <a:ea typeface="Calibri" charset="0"/>
                         <a:cs typeface="Calibri" charset="0"/>
@@ -23354,7 +23308,7 @@
                         <a:buNone/>
                       </a:pPr>
                       <a:r>
-                        <a:rPr lang="en-US" sz="1300" dirty="0">
+                        <a:rPr lang="en-US" sz="2000" dirty="0">
                           <a:solidFill>
                             <a:srgbClr val="1B1B1F"/>
                           </a:solidFill>
@@ -23364,7 +23318,7 @@
                         </a:rPr>
                         <a:t>a</a:t>
                       </a:r>
-                      <a:endParaRPr lang="en-US" sz="1300" dirty="0">
+                      <a:endParaRPr lang="en-US" sz="2000" dirty="0">
                         <a:latin typeface="Calibri" charset="0"/>
                         <a:ea typeface="Calibri" charset="0"/>
                         <a:cs typeface="Calibri" charset="0"/>
@@ -23422,7 +23376,7 @@
                         <a:buNone/>
                       </a:pPr>
                       <a:r>
-                        <a:rPr lang="en-US" sz="1300" dirty="0">
+                        <a:rPr lang="en-US" sz="2000" dirty="0">
                           <a:solidFill>
                             <a:srgbClr val="1B1B1F"/>
                           </a:solidFill>
@@ -23432,7 +23386,7 @@
                         </a:rPr>
                         <a:t>b</a:t>
                       </a:r>
-                      <a:endParaRPr lang="en-US" sz="1300" dirty="0">
+                      <a:endParaRPr lang="en-US" sz="2000" dirty="0">
                         <a:latin typeface="Calibri" charset="0"/>
                         <a:ea typeface="Calibri" charset="0"/>
                         <a:cs typeface="Calibri" charset="0"/>
@@ -23490,7 +23444,7 @@
                         <a:buNone/>
                       </a:pPr>
                       <a:r>
-                        <a:rPr lang="en-US" sz="1300" dirty="0">
+                        <a:rPr lang="en-US" sz="2000" dirty="0">
                           <a:solidFill>
                             <a:srgbClr val="1B1B1F"/>
                           </a:solidFill>
@@ -23500,7 +23454,7 @@
                         </a:rPr>
                         <a:t>s</a:t>
                       </a:r>
-                      <a:endParaRPr lang="en-US" sz="1300" dirty="0">
+                      <a:endParaRPr lang="en-US" sz="2000" dirty="0">
                         <a:latin typeface="Calibri" charset="0"/>
                         <a:ea typeface="Calibri" charset="0"/>
                         <a:cs typeface="Calibri" charset="0"/>
@@ -23558,7 +23512,7 @@
                         <a:buNone/>
                       </a:pPr>
                       <a:r>
-                        <a:rPr lang="en-US" sz="1300" dirty="0">
+                        <a:rPr lang="en-US" sz="2000" dirty="0">
                           <a:solidFill>
                             <a:srgbClr val="1B1B1F"/>
                           </a:solidFill>
@@ -23568,7 +23522,7 @@
                         </a:rPr>
                         <a:t>c</a:t>
                       </a:r>
-                      <a:endParaRPr lang="en-US" sz="1300" dirty="0">
+                      <a:endParaRPr lang="en-US" sz="2000" dirty="0">
                         <a:latin typeface="Calibri" charset="0"/>
                         <a:ea typeface="Calibri" charset="0"/>
                         <a:cs typeface="Calibri" charset="0"/>
@@ -23626,7 +23580,7 @@
                         <a:buNone/>
                       </a:pPr>
                       <a:r>
-                        <a:rPr lang="en-US" sz="1300" dirty="0">
+                        <a:rPr lang="en-US" sz="2000" dirty="0">
                           <a:solidFill>
                             <a:srgbClr val="1B1B1F"/>
                           </a:solidFill>
@@ -23636,7 +23590,7 @@
                         </a:rPr>
                         <a:t>h</a:t>
                       </a:r>
-                      <a:endParaRPr lang="en-US" sz="1300" dirty="0">
+                      <a:endParaRPr lang="en-US" sz="2000" dirty="0">
                         <a:latin typeface="Calibri" charset="0"/>
                         <a:ea typeface="Calibri" charset="0"/>
                         <a:cs typeface="Calibri" charset="0"/>
@@ -23694,7 +23648,7 @@
                         <a:buNone/>
                       </a:pPr>
                       <a:r>
-                        <a:rPr lang="en-US" sz="1300" dirty="0">
+                        <a:rPr lang="en-US" sz="2000" dirty="0">
                           <a:solidFill>
                             <a:srgbClr val="1B1B1F"/>
                           </a:solidFill>
@@ -23704,7 +23658,7 @@
                         </a:rPr>
                         <a:t>f</a:t>
                       </a:r>
-                      <a:endParaRPr lang="en-US" sz="1300" dirty="0">
+                      <a:endParaRPr lang="en-US" sz="2000" dirty="0">
                         <a:latin typeface="Calibri" charset="0"/>
                         <a:ea typeface="Calibri" charset="0"/>
                         <a:cs typeface="Calibri" charset="0"/>
@@ -23762,7 +23716,7 @@
                         <a:buNone/>
                       </a:pPr>
                       <a:r>
-                        <a:rPr lang="en-US" sz="1300" dirty="0">
+                        <a:rPr lang="en-US" sz="2000" dirty="0">
                           <a:solidFill>
                             <a:srgbClr val="1B1B1F"/>
                           </a:solidFill>
@@ -23772,7 +23726,7 @@
                         </a:rPr>
                         <a:t>t</a:t>
                       </a:r>
-                      <a:endParaRPr lang="en-US" sz="1300" dirty="0">
+                      <a:endParaRPr lang="en-US" sz="2000" dirty="0">
                         <a:latin typeface="Calibri" charset="0"/>
                         <a:ea typeface="Calibri" charset="0"/>
                         <a:cs typeface="Calibri" charset="0"/>
@@ -23830,7 +23784,7 @@
                         <a:buNone/>
                       </a:pPr>
                       <a:r>
-                        <a:rPr lang="en-US" sz="1300" dirty="0">
+                        <a:rPr lang="en-US" sz="2000" dirty="0">
                           <a:solidFill>
                             <a:srgbClr val="1B1B1F"/>
                           </a:solidFill>
@@ -23840,7 +23794,7 @@
                         </a:rPr>
                         <a:t>l</a:t>
                       </a:r>
-                      <a:endParaRPr lang="en-US" sz="1300" dirty="0">
+                      <a:endParaRPr lang="en-US" sz="2000" dirty="0">
                         <a:latin typeface="Calibri" charset="0"/>
                         <a:ea typeface="Calibri" charset="0"/>
                         <a:cs typeface="Calibri" charset="0"/>
@@ -23898,7 +23852,7 @@
                         <a:buNone/>
                       </a:pPr>
                       <a:r>
-                        <a:rPr lang="en-US" sz="1300" dirty="0">
+                        <a:rPr lang="en-US" sz="2000" dirty="0">
                           <a:solidFill>
                             <a:srgbClr val="1B1B1F"/>
                           </a:solidFill>
@@ -23908,7 +23862,7 @@
                         </a:rPr>
                         <a:t>g</a:t>
                       </a:r>
-                      <a:endParaRPr lang="en-US" sz="1300" dirty="0">
+                      <a:endParaRPr lang="en-US" sz="2000" dirty="0">
                         <a:latin typeface="Calibri" charset="0"/>
                         <a:ea typeface="Calibri" charset="0"/>
                         <a:cs typeface="Calibri" charset="0"/>
